--- a/Sesion04a/Sesion04.pptx
+++ b/Sesion04a/Sesion04.pptx
@@ -258,7 +258,7 @@
           <a:p>
             <a:fld id="{70EC4B9E-347C-4104-ADB9-149F35A33AD1}" type="datetimeFigureOut">
               <a:rPr lang="es-US" smtClean="0"/>
-              <a:t>10/28/2024</a:t>
+              <a:t>11/2/2024</a:t>
             </a:fld>
             <a:endParaRPr lang="es-US"/>
           </a:p>
@@ -428,7 +428,7 @@
           <a:p>
             <a:fld id="{70EC4B9E-347C-4104-ADB9-149F35A33AD1}" type="datetimeFigureOut">
               <a:rPr lang="es-US" smtClean="0"/>
-              <a:t>10/28/2024</a:t>
+              <a:t>11/2/2024</a:t>
             </a:fld>
             <a:endParaRPr lang="es-US"/>
           </a:p>
@@ -608,7 +608,7 @@
           <a:p>
             <a:fld id="{70EC4B9E-347C-4104-ADB9-149F35A33AD1}" type="datetimeFigureOut">
               <a:rPr lang="es-US" smtClean="0"/>
-              <a:t>10/28/2024</a:t>
+              <a:t>11/2/2024</a:t>
             </a:fld>
             <a:endParaRPr lang="es-US"/>
           </a:p>
@@ -778,7 +778,7 @@
           <a:p>
             <a:fld id="{70EC4B9E-347C-4104-ADB9-149F35A33AD1}" type="datetimeFigureOut">
               <a:rPr lang="es-US" smtClean="0"/>
-              <a:t>10/28/2024</a:t>
+              <a:t>11/2/2024</a:t>
             </a:fld>
             <a:endParaRPr lang="es-US"/>
           </a:p>
@@ -1024,7 +1024,7 @@
           <a:p>
             <a:fld id="{70EC4B9E-347C-4104-ADB9-149F35A33AD1}" type="datetimeFigureOut">
               <a:rPr lang="es-US" smtClean="0"/>
-              <a:t>10/28/2024</a:t>
+              <a:t>11/2/2024</a:t>
             </a:fld>
             <a:endParaRPr lang="es-US"/>
           </a:p>
@@ -1256,7 +1256,7 @@
           <a:p>
             <a:fld id="{70EC4B9E-347C-4104-ADB9-149F35A33AD1}" type="datetimeFigureOut">
               <a:rPr lang="es-US" smtClean="0"/>
-              <a:t>10/28/2024</a:t>
+              <a:t>11/2/2024</a:t>
             </a:fld>
             <a:endParaRPr lang="es-US"/>
           </a:p>
@@ -1623,7 +1623,7 @@
           <a:p>
             <a:fld id="{70EC4B9E-347C-4104-ADB9-149F35A33AD1}" type="datetimeFigureOut">
               <a:rPr lang="es-US" smtClean="0"/>
-              <a:t>10/28/2024</a:t>
+              <a:t>11/2/2024</a:t>
             </a:fld>
             <a:endParaRPr lang="es-US"/>
           </a:p>
@@ -1741,7 +1741,7 @@
           <a:p>
             <a:fld id="{70EC4B9E-347C-4104-ADB9-149F35A33AD1}" type="datetimeFigureOut">
               <a:rPr lang="es-US" smtClean="0"/>
-              <a:t>10/28/2024</a:t>
+              <a:t>11/2/2024</a:t>
             </a:fld>
             <a:endParaRPr lang="es-US"/>
           </a:p>
@@ -1836,7 +1836,7 @@
           <a:p>
             <a:fld id="{70EC4B9E-347C-4104-ADB9-149F35A33AD1}" type="datetimeFigureOut">
               <a:rPr lang="es-US" smtClean="0"/>
-              <a:t>10/28/2024</a:t>
+              <a:t>11/2/2024</a:t>
             </a:fld>
             <a:endParaRPr lang="es-US"/>
           </a:p>
@@ -2113,7 +2113,7 @@
           <a:p>
             <a:fld id="{70EC4B9E-347C-4104-ADB9-149F35A33AD1}" type="datetimeFigureOut">
               <a:rPr lang="es-US" smtClean="0"/>
-              <a:t>10/28/2024</a:t>
+              <a:t>11/2/2024</a:t>
             </a:fld>
             <a:endParaRPr lang="es-US"/>
           </a:p>
@@ -2366,7 +2366,7 @@
           <a:p>
             <a:fld id="{70EC4B9E-347C-4104-ADB9-149F35A33AD1}" type="datetimeFigureOut">
               <a:rPr lang="es-US" smtClean="0"/>
-              <a:t>10/28/2024</a:t>
+              <a:t>11/2/2024</a:t>
             </a:fld>
             <a:endParaRPr lang="es-US"/>
           </a:p>
@@ -2579,7 +2579,7 @@
           <a:p>
             <a:fld id="{70EC4B9E-347C-4104-ADB9-149F35A33AD1}" type="datetimeFigureOut">
               <a:rPr lang="es-US" smtClean="0"/>
-              <a:t>10/28/2024</a:t>
+              <a:t>11/2/2024</a:t>
             </a:fld>
             <a:endParaRPr lang="es-US"/>
           </a:p>
